--- a/sales/U-writing_sales_v7.pptx
+++ b/sales/U-writing_sales_v7.pptx
@@ -20715,7 +20715,7 @@
             <a:avLst/>
           </a:prstGeom>
           <a:solidFill>
-            <a:srgbClr val="145F6B"/>
+            <a:srgbClr val="D9764A"/>
           </a:solidFill>
           <a:ln>
             <a:noFill/>
@@ -20939,7 +20939,7 @@
             <a:avLst/>
           </a:prstGeom>
           <a:solidFill>
-            <a:srgbClr val="2A2F33"/>
+            <a:srgbClr val="145F6B"/>
           </a:solidFill>
           <a:ln>
             <a:noFill/>
@@ -21163,7 +21163,7 @@
             <a:avLst/>
           </a:prstGeom>
           <a:solidFill>
-            <a:srgbClr val="2A2F33"/>
+            <a:srgbClr val="145F6B"/>
           </a:solidFill>
           <a:ln>
             <a:noFill/>
